--- a/KANBAN_Lite_Slides.pptx
+++ b/KANBAN_Lite_Slides.pptx
@@ -290,9 +290,46 @@
           <a:lstStyle/>
           <a:p>
             <a:r>
-              <a:rPr lang="en-US" dirty="0"/>
-              <a:t>約 20 秒。開場：這次作品是 KANBAN Lite，一個小型任務流程管理系統。我的重點不是做很大的 ERP，而是透過一個能操作的看板專案，邊做邊理解 SDLC。</a:t>
-            </a:r>
+              <a:rPr lang="en-US" dirty="0" err="1"/>
+              <a:t>開場：</a:t>
+            </a:r>
+            <a:r>
+              <a:rPr lang="en-US" altLang="zh-TW" sz="1200" b="0" i="0" kern="1200" dirty="0" err="1">
+                <a:solidFill>
+                  <a:schemeClr val="tx1"/>
+                </a:solidFill>
+                <a:effectLst/>
+                <a:latin typeface="+mn-lt"/>
+                <a:ea typeface="+mn-ea"/>
+                <a:cs typeface="+mn-cs"/>
+              </a:rPr>
+              <a:t>KANBAN</a:t>
+            </a:r>
+            <a:r>
+              <a:rPr lang="en-US" altLang="zh-TW" sz="1200" b="0" i="0" kern="1200" dirty="0">
+                <a:solidFill>
+                  <a:schemeClr val="tx1"/>
+                </a:solidFill>
+                <a:effectLst/>
+                <a:latin typeface="+mn-lt"/>
+                <a:ea typeface="+mn-ea"/>
+                <a:cs typeface="+mn-cs"/>
+              </a:rPr>
+              <a:t> Lite </a:t>
+            </a:r>
+            <a:r>
+              <a:rPr lang="zh-TW" altLang="en-US" sz="1200" b="0" i="0" kern="1200" dirty="0">
+                <a:solidFill>
+                  <a:schemeClr val="tx1"/>
+                </a:solidFill>
+                <a:effectLst/>
+                <a:latin typeface="+mn-lt"/>
+                <a:ea typeface="+mn-ea"/>
+                <a:cs typeface="+mn-cs"/>
+              </a:rPr>
+              <a:t>是針對個人設計的任務流程管理工具，目標是用簡單的看板、狀態分類與與統計，讓使用者快速掌握任務進度與優先順序。</a:t>
+            </a:r>
+            <a:endParaRPr lang="en-US" dirty="0"/>
           </a:p>
         </p:txBody>
       </p:sp>
@@ -377,9 +414,54 @@
           <a:lstStyle/>
           <a:p>
             <a:r>
-              <a:rPr lang="en-US" dirty="0"/>
-              <a:t>約 35 秒。這頁不是介紹作品，而是先說 Kanban 本身。Kanban 是一種敏捷管理方法，用視覺化看板追蹤不同完成階段。它的精神是持續改進與拉動式流程，不是一次把大量工作推給團隊。</a:t>
-            </a:r>
+              <a:rPr lang="en-US" altLang="zh-TW" dirty="0"/>
+              <a:t>Kanban </a:t>
+            </a:r>
+            <a:r>
+              <a:rPr lang="zh-TW" altLang="en-US" dirty="0"/>
+              <a:t>的起源可以追溯到 </a:t>
+            </a:r>
+            <a:r>
+              <a:rPr lang="en-US" altLang="zh-TW" dirty="0"/>
+              <a:t>1940 </a:t>
+            </a:r>
+            <a:r>
+              <a:rPr lang="zh-TW" altLang="en-US" dirty="0"/>
+              <a:t>年代，</a:t>
+            </a:r>
+            <a:r>
+              <a:rPr lang="en-US" altLang="zh-TW" dirty="0"/>
+              <a:t>Toyota </a:t>
+            </a:r>
+            <a:r>
+              <a:rPr lang="zh-TW" altLang="en-US" dirty="0"/>
+              <a:t>的工程師創造了這套管理系統，最早是用來改善工廠生產流程。</a:t>
+            </a:r>
+            <a:r>
+              <a:rPr lang="en-US" altLang="zh-TW" dirty="0"/>
+              <a:t>2004 </a:t>
+            </a:r>
+            <a:r>
+              <a:rPr lang="zh-TW" altLang="en-US" dirty="0"/>
+              <a:t>年左右，這套概念被應用在 </a:t>
+            </a:r>
+            <a:r>
+              <a:rPr lang="en-US" altLang="zh-TW" dirty="0"/>
+              <a:t>Microsoft </a:t>
+            </a:r>
+            <a:r>
+              <a:rPr lang="zh-TW" altLang="en-US" dirty="0"/>
+              <a:t>的軟體開發與 </a:t>
+            </a:r>
+            <a:r>
+              <a:rPr lang="en-US" altLang="zh-TW" dirty="0"/>
+              <a:t>IT </a:t>
+            </a:r>
+            <a:r>
+              <a:rPr lang="zh-TW" altLang="en-US" dirty="0"/>
+              <a:t>工作流程中，之後也逐漸被專案管理領域廣泛使用。它的核心精神是將工作視覺化、限制進行中的工作量，並透過持續觀察流程瓶頸來改善效率。</a:t>
+            </a:r>
+            <a:endParaRPr lang="en-US" dirty="0"/>
           </a:p>
         </p:txBody>
       </p:sp>
@@ -464,8 +546,24 @@
           <a:lstStyle/>
           <a:p>
             <a:r>
-              <a:rPr lang="en-US" dirty="0"/>
-              <a:t>約 40 秒。重點是：Kanban 本身就是項目管理方法，所以我想用這個題目來理解 SDLC。從需求、規劃、設計、實作、測試到修正，都可以用看板的方式追蹤。</a:t>
+              <a:rPr lang="zh-TW" altLang="en-US" dirty="0"/>
+              <a:t>我會選擇這個題目的原因是想透過實作一個輕量化的 </a:t>
+            </a:r>
+            <a:r>
+              <a:rPr lang="en-US" altLang="zh-TW" dirty="0"/>
+              <a:t>Kanban </a:t>
+            </a:r>
+            <a:r>
+              <a:rPr lang="zh-TW" altLang="en-US" dirty="0"/>
+              <a:t>系統，一邊完成作品，一邊更具體理解軟體開發生命週期，我的作品從訂定主題開始，也經歷了一部分</a:t>
+            </a:r>
+            <a:r>
+              <a:rPr lang="en-US" altLang="zh-TW" dirty="0"/>
+              <a:t>SDLC</a:t>
+            </a:r>
+            <a:r>
+              <a:rPr lang="zh-TW" altLang="en-US" dirty="0"/>
+              <a:t>，像是需求分析、規劃設計、實作開發、測試驗證，目前這個版本主要完成前端功能。後續如果繼續擴充，我也希望可以嘗試往實際部署與持續維運的階段延伸。</a:t>
             </a:r>
           </a:p>
         </p:txBody>
@@ -551,8 +649,22 @@
           <a:lstStyle/>
           <a:p>
             <a:r>
-              <a:rPr lang="en-US" dirty="0"/>
-              <a:t>約 15 秒。這頁可以快速帶過，主要說明有安排專題時程，後面直接進入作品與展示。</a:t>
+              <a:rPr lang="zh-TW" altLang="en-US" dirty="0"/>
+              <a:t>這是我的實際開發時程。我採用滾動式規劃，以先完成 </a:t>
+            </a:r>
+            <a:r>
+              <a:rPr lang="en-US" altLang="zh-TW" dirty="0"/>
+              <a:t>MVP </a:t>
+            </a:r>
+            <a:r>
+              <a:rPr lang="zh-TW" altLang="en-US" dirty="0"/>
+              <a:t>為原則，先把核心功能做出來，再依照剩餘時間逐步加入其他功能。</a:t>
+            </a:r>
+          </a:p>
+          <a:p>
+            <a:r>
+              <a:rPr lang="zh-TW" altLang="en-US" dirty="0"/>
+              <a:t>比較可惜的是，原本有規劃篩選功能，但因為時間限制，最後沒有放進這次的報告版本，先確保核心功能穩定。</a:t>
             </a:r>
           </a:p>
         </p:txBody>
@@ -638,9 +750,26 @@
           <a:lstStyle/>
           <a:p>
             <a:r>
-              <a:rPr lang="en-US" dirty="0"/>
-              <a:t>約 45 秒。這裡只講總覽，不要逐項細講，因為下一頁會進入實際展示。說明作品分成 Dashboard、看板、任務 CRUD、資料保存四個部分。</a:t>
-            </a:r>
+              <a:rPr lang="zh-TW" altLang="en-US" dirty="0"/>
+              <a:t>那我作品包含總覽、我的看板頁、任務的</a:t>
+            </a:r>
+            <a:r>
+              <a:rPr lang="en-US" altLang="zh-TW" dirty="0"/>
+              <a:t>CRUD</a:t>
+            </a:r>
+            <a:r>
+              <a:rPr lang="zh-TW" altLang="en-US" dirty="0"/>
+              <a:t>、以及我使用</a:t>
+            </a:r>
+            <a:r>
+              <a:rPr lang="en-US" altLang="zh-TW" dirty="0" err="1"/>
+              <a:t>localstorage</a:t>
+            </a:r>
+            <a:r>
+              <a:rPr lang="zh-TW" altLang="en-US" dirty="0"/>
+              <a:t>的方式來儲存資料，關閉網頁或重新整理後可以把資料保存在本地。</a:t>
+            </a:r>
+            <a:endParaRPr lang="en-US" dirty="0"/>
           </a:p>
         </p:txBody>
       </p:sp>
@@ -725,9 +854,242 @@
           <a:lstStyle/>
           <a:p>
             <a:r>
-              <a:rPr lang="en-US" dirty="0"/>
-              <a:t>約 90 到 120 秒。照這五步展示，不要臨時亂開功能。重點是讓老師看到完整流程：看總覽、看任務、新增、編輯刪除、拖曳、回總覽看統計同步。</a:t>
-            </a:r>
+              <a:rPr lang="zh-TW" altLang="en-US" dirty="0"/>
+              <a:t>首先是總覽頁</a:t>
+            </a:r>
+            <a:r>
+              <a:rPr lang="en-US" altLang="zh-TW" dirty="0"/>
+              <a:t>-</a:t>
+            </a:r>
+            <a:r>
+              <a:rPr lang="zh-TW" altLang="en-US" dirty="0"/>
+              <a:t>可以看到總任務數量與每個狀態的任務數量</a:t>
+            </a:r>
+            <a:r>
+              <a:rPr lang="en-US" altLang="zh-TW" dirty="0"/>
+              <a:t>-</a:t>
+            </a:r>
+            <a:r>
+              <a:rPr lang="zh-TW" altLang="en-US" dirty="0"/>
+              <a:t>任務完成度</a:t>
+            </a:r>
+            <a:r>
+              <a:rPr lang="en-US" altLang="zh-TW" dirty="0"/>
+              <a:t>-</a:t>
+            </a:r>
+            <a:r>
+              <a:rPr lang="zh-TW" altLang="en-US" dirty="0"/>
+              <a:t>未完成任務時間與優先度數量</a:t>
+            </a:r>
+            <a:r>
+              <a:rPr lang="en-US" altLang="zh-TW" dirty="0"/>
+              <a:t>-</a:t>
+            </a:r>
+            <a:r>
+              <a:rPr lang="zh-TW" altLang="en-US" dirty="0"/>
+              <a:t>條列未完成高優先度任務，因為目前沒有任務，所以顯示沒有待處理的高優先度任務</a:t>
+            </a:r>
+            <a:r>
+              <a:rPr lang="en-US" altLang="zh-TW" dirty="0"/>
+              <a:t>-</a:t>
+            </a:r>
+            <a:r>
+              <a:rPr lang="zh-TW" altLang="en-US" dirty="0"/>
+              <a:t>之後點側邊欄切換到我的看板分頁</a:t>
+            </a:r>
+            <a:r>
+              <a:rPr lang="en-US" altLang="zh-TW" dirty="0"/>
+              <a:t>-</a:t>
+            </a:r>
+            <a:r>
+              <a:rPr lang="zh-TW" altLang="en-US" dirty="0"/>
+              <a:t>可以新增任務</a:t>
+            </a:r>
+            <a:r>
+              <a:rPr lang="en-US" altLang="zh-TW" dirty="0"/>
+              <a:t>-</a:t>
+            </a:r>
+            <a:r>
+              <a:rPr lang="zh-TW" altLang="en-US" dirty="0"/>
+              <a:t>標題以及描述我設定為必填的內容</a:t>
+            </a:r>
+            <a:r>
+              <a:rPr lang="en-US" altLang="zh-TW" dirty="0"/>
+              <a:t>-</a:t>
+            </a:r>
+            <a:r>
+              <a:rPr lang="zh-TW" altLang="en-US" dirty="0"/>
+              <a:t>標籤沒填會預設代入</a:t>
+            </a:r>
+            <a:r>
+              <a:rPr lang="en-US" altLang="zh-TW" dirty="0"/>
+              <a:t>general-</a:t>
+            </a:r>
+            <a:r>
+              <a:rPr lang="zh-TW" altLang="en-US" dirty="0"/>
+              <a:t>日期沒填會設定為無截止日期</a:t>
+            </a:r>
+            <a:r>
+              <a:rPr lang="en-US" altLang="zh-TW" dirty="0"/>
+              <a:t>-</a:t>
+            </a:r>
+            <a:r>
+              <a:rPr lang="zh-TW" altLang="en-US" dirty="0"/>
+              <a:t>回到總覽頁可以看到剛剛新增的任務會即時更新</a:t>
+            </a:r>
+            <a:r>
+              <a:rPr lang="en-US" altLang="zh-TW" dirty="0"/>
+              <a:t>-</a:t>
+            </a:r>
+            <a:r>
+              <a:rPr lang="zh-TW" altLang="en-US" dirty="0"/>
+              <a:t>之後點開剛剛創建的任務可以對任務進行編輯</a:t>
+            </a:r>
+            <a:r>
+              <a:rPr lang="en-US" altLang="zh-TW" dirty="0"/>
+              <a:t>-</a:t>
+            </a:r>
+            <a:r>
+              <a:rPr lang="zh-TW" altLang="en-US" dirty="0"/>
+              <a:t>每個欄位會自動帶入任務原本的內容</a:t>
+            </a:r>
+            <a:r>
+              <a:rPr lang="en-US" altLang="zh-TW" dirty="0"/>
+              <a:t>-</a:t>
+            </a:r>
+            <a:r>
+              <a:rPr lang="zh-TW" altLang="en-US" dirty="0"/>
+              <a:t>編輯完進行儲存，畫面也會立刻更新</a:t>
+            </a:r>
+            <a:r>
+              <a:rPr lang="en-US" altLang="zh-TW" dirty="0"/>
+              <a:t>-</a:t>
+            </a:r>
+            <a:r>
+              <a:rPr lang="zh-TW" altLang="en-US" dirty="0"/>
+              <a:t>那再點開任務，也可以發現左下角會多一個刪除任務的選項可以刪除任務</a:t>
+            </a:r>
+            <a:r>
+              <a:rPr lang="en-US" altLang="zh-TW" dirty="0"/>
+              <a:t>-</a:t>
+            </a:r>
+            <a:r>
+              <a:rPr lang="zh-TW" altLang="en-US" dirty="0"/>
+              <a:t>順帶一提，這個互動視窗與新增任務共用同一段</a:t>
+            </a:r>
+            <a:r>
+              <a:rPr lang="en-US" altLang="zh-TW" dirty="0"/>
+              <a:t>HTML</a:t>
+            </a:r>
+            <a:r>
+              <a:rPr lang="zh-TW" altLang="en-US" dirty="0"/>
+              <a:t>程式碼，我透過判斷新增或編輯任務來變更視窗的標題與內容，以狀態驅動畫面的形式來實現程式碼的可重用性以及</a:t>
+            </a:r>
+            <a:r>
+              <a:rPr lang="en-US" altLang="zh-TW" dirty="0"/>
+              <a:t>DRY</a:t>
+            </a:r>
+            <a:r>
+              <a:rPr lang="zh-TW" altLang="en-US" dirty="0"/>
+              <a:t>原則也就是</a:t>
+            </a:r>
+            <a:r>
+              <a:rPr lang="en-US" altLang="zh-TW" dirty="0"/>
+              <a:t>Don‘t Repeat Yourself-</a:t>
+            </a:r>
+            <a:r>
+              <a:rPr lang="zh-TW" altLang="en-US" dirty="0"/>
+              <a:t>之後點擊刪除任務會跳出二次確認以防使用者誤刪</a:t>
+            </a:r>
+            <a:r>
+              <a:rPr lang="en-US" altLang="zh-TW" dirty="0"/>
+              <a:t>-</a:t>
+            </a:r>
+            <a:r>
+              <a:rPr lang="zh-TW" altLang="en-US" dirty="0"/>
+              <a:t>之後我就以事先準備範例資料來做說明</a:t>
+            </a:r>
+            <a:r>
+              <a:rPr lang="en-US" altLang="zh-TW" dirty="0"/>
+              <a:t>(</a:t>
+            </a:r>
+            <a:r>
+              <a:rPr lang="zh-TW" altLang="en-US" dirty="0"/>
+              <a:t>前往設定將預設的範例資料進行套用</a:t>
+            </a:r>
+            <a:r>
+              <a:rPr lang="en-US" altLang="zh-TW" dirty="0"/>
+              <a:t>)-</a:t>
+            </a:r>
+            <a:r>
+              <a:rPr lang="zh-TW" altLang="en-US" dirty="0"/>
+              <a:t>可以任務分為高中低三種優先度</a:t>
+            </a:r>
+            <a:r>
+              <a:rPr lang="en-US" altLang="zh-TW" dirty="0"/>
+              <a:t>-</a:t>
+            </a:r>
+            <a:r>
+              <a:rPr lang="zh-TW" altLang="en-US" dirty="0"/>
+              <a:t>以及截止日期也根據是否快要到期制定不同的顏色，我將</a:t>
+            </a:r>
+            <a:r>
+              <a:rPr lang="en-US" altLang="zh-TW" dirty="0"/>
+              <a:t>3</a:t>
+            </a:r>
+            <a:r>
+              <a:rPr lang="zh-TW" altLang="en-US" dirty="0"/>
+              <a:t>天內到期的任務標示為黃色，今天到期或是逾期的任務標示紅色，那這個日期也是根據當天的日期動態產生的，為的是每次測試都可以覆蓋所有截止日期的測試場景</a:t>
+            </a:r>
+            <a:r>
+              <a:rPr lang="en-US" altLang="zh-TW" dirty="0"/>
+              <a:t>-</a:t>
+            </a:r>
+            <a:r>
+              <a:rPr lang="zh-TW" altLang="en-US" dirty="0"/>
+              <a:t>可以看到我有對</a:t>
+            </a:r>
+            <a:r>
+              <a:rPr lang="en-US" altLang="zh-TW" dirty="0"/>
+              <a:t>XSS</a:t>
+            </a:r>
+            <a:r>
+              <a:rPr lang="zh-TW" altLang="en-US" dirty="0"/>
+              <a:t>做基礎的防護，像是這個任務在標題及描述都用了</a:t>
+            </a:r>
+            <a:r>
+              <a:rPr lang="en-US" altLang="zh-TW" dirty="0"/>
+              <a:t>HTML</a:t>
+            </a:r>
+            <a:r>
+              <a:rPr lang="zh-TW" altLang="en-US" dirty="0"/>
+              <a:t>語法，並沒有被瀏覽器執行</a:t>
+            </a:r>
+            <a:r>
+              <a:rPr lang="en-US" altLang="zh-TW" dirty="0"/>
+              <a:t>-</a:t>
+            </a:r>
+            <a:r>
+              <a:rPr lang="zh-TW" altLang="en-US" dirty="0"/>
+              <a:t>使用者可以用拖曳任務的形式來快速切換狀態</a:t>
+            </a:r>
+            <a:r>
+              <a:rPr lang="en-US" altLang="zh-TW" dirty="0"/>
+              <a:t>-</a:t>
+            </a:r>
+            <a:r>
+              <a:rPr lang="zh-TW" altLang="en-US" dirty="0"/>
+              <a:t>可以看到總覽頁也是會實時更新目前的任務狀態</a:t>
+            </a:r>
+            <a:r>
+              <a:rPr lang="en-US" altLang="zh-TW" dirty="0"/>
+              <a:t>-</a:t>
+            </a:r>
+            <a:r>
+              <a:rPr lang="zh-TW" altLang="en-US" dirty="0"/>
+              <a:t>在設定可以清除所有資料，讓看板回到初始狀態</a:t>
+            </a:r>
+            <a:endParaRPr lang="en-US" dirty="0"/>
           </a:p>
         </p:txBody>
       </p:sp>
@@ -812,9 +1174,154 @@
           <a:lstStyle/>
           <a:p>
             <a:r>
-              <a:rPr lang="en-US" dirty="0"/>
-              <a:t>約 35 秒。這頁要誠實但不要把自己講得像全靠 AI。CSS 的初始視覺基底使用 AI 較多，但 JS 核心流程自己有理解與整合。</a:t>
-            </a:r>
+              <a:rPr lang="en-US" altLang="zh-TW" dirty="0"/>
+              <a:t>AI </a:t>
+            </a:r>
+            <a:r>
+              <a:rPr lang="zh-TW" altLang="en-US" dirty="0"/>
+              <a:t>使用率的部分，我主要是依照不同區塊來區分。</a:t>
+            </a:r>
+          </a:p>
+          <a:p>
+            <a:r>
+              <a:rPr lang="en-US" altLang="zh-TW" dirty="0"/>
+              <a:t>CSS </a:t>
+            </a:r>
+            <a:r>
+              <a:rPr lang="zh-TW" altLang="en-US" dirty="0"/>
+              <a:t>的部分使用 </a:t>
+            </a:r>
+            <a:r>
+              <a:rPr lang="en-US" altLang="zh-TW" dirty="0"/>
+              <a:t>AI </a:t>
+            </a:r>
+            <a:r>
+              <a:rPr lang="zh-TW" altLang="en-US" dirty="0"/>
+              <a:t>較多，因為我不想把大部分時間花在視覺設計細節上，所以像顏色設計、陰影、動畫效果，</a:t>
+            </a:r>
+            <a:r>
+              <a:rPr lang="en-US" altLang="zh-TW" dirty="0"/>
+              <a:t>AI </a:t>
+            </a:r>
+            <a:r>
+              <a:rPr lang="zh-TW" altLang="en-US" dirty="0"/>
+              <a:t>輔助比例比較高。不過版面主體架構，例如哪些區塊適合用 </a:t>
+            </a:r>
+            <a:r>
+              <a:rPr lang="en-US" altLang="zh-TW" dirty="0"/>
+              <a:t>flex</a:t>
+            </a:r>
+            <a:r>
+              <a:rPr lang="zh-TW" altLang="en-US" dirty="0"/>
+              <a:t>、哪些地方適合用 </a:t>
+            </a:r>
+            <a:r>
+              <a:rPr lang="en-US" altLang="zh-TW" dirty="0"/>
+              <a:t>grid</a:t>
+            </a:r>
+            <a:r>
+              <a:rPr lang="zh-TW" altLang="en-US" dirty="0"/>
+              <a:t>，以及 </a:t>
+            </a:r>
+            <a:r>
+              <a:rPr lang="en-US" altLang="zh-TW" dirty="0"/>
+              <a:t>hover </a:t>
+            </a:r>
+            <a:r>
+              <a:rPr lang="zh-TW" altLang="en-US" dirty="0"/>
+              <a:t>互動要怎麼呈現，是我先完成雛形後，再請 </a:t>
+            </a:r>
+            <a:r>
+              <a:rPr lang="en-US" altLang="zh-TW" dirty="0"/>
+              <a:t>AI </a:t>
+            </a:r>
+            <a:r>
+              <a:rPr lang="zh-TW" altLang="en-US" dirty="0"/>
+              <a:t>協助優化成比較完整的視覺風格。</a:t>
+            </a:r>
+          </a:p>
+          <a:p>
+            <a:r>
+              <a:rPr lang="en-US" altLang="zh-TW" dirty="0"/>
+              <a:t>JavaScript </a:t>
+            </a:r>
+            <a:r>
+              <a:rPr lang="zh-TW" altLang="en-US" dirty="0"/>
+              <a:t>和 </a:t>
+            </a:r>
+            <a:r>
+              <a:rPr lang="en-US" altLang="zh-TW" dirty="0"/>
+              <a:t>HTML </a:t>
+            </a:r>
+            <a:r>
+              <a:rPr lang="zh-TW" altLang="en-US" dirty="0"/>
+              <a:t>的部分，</a:t>
+            </a:r>
+            <a:r>
+              <a:rPr lang="en-US" altLang="zh-TW" dirty="0"/>
+              <a:t>AI </a:t>
+            </a:r>
+            <a:r>
+              <a:rPr lang="zh-TW" altLang="en-US" dirty="0"/>
+              <a:t>主要用在 </a:t>
+            </a:r>
+            <a:r>
+              <a:rPr lang="en-US" altLang="zh-TW" dirty="0"/>
+              <a:t>code review</a:t>
+            </a:r>
+            <a:r>
+              <a:rPr lang="zh-TW" altLang="en-US" dirty="0"/>
+              <a:t>、</a:t>
+            </a:r>
+            <a:r>
+              <a:rPr lang="en-US" altLang="zh-TW" dirty="0"/>
+              <a:t>debug</a:t>
+            </a:r>
+            <a:r>
+              <a:rPr lang="zh-TW" altLang="en-US" dirty="0"/>
+              <a:t>、結構微調，以及提供重構方向。我在使用 </a:t>
+            </a:r>
+            <a:r>
+              <a:rPr lang="en-US" altLang="zh-TW" dirty="0"/>
+              <a:t>AI </a:t>
+            </a:r>
+            <a:r>
+              <a:rPr lang="zh-TW" altLang="en-US" dirty="0"/>
+              <a:t>時，這部分我會要求 </a:t>
+            </a:r>
+            <a:r>
+              <a:rPr lang="en-US" altLang="zh-TW" dirty="0"/>
+              <a:t>AI</a:t>
+            </a:r>
+            <a:r>
+              <a:rPr lang="zh-TW" altLang="en-US" dirty="0"/>
+              <a:t> 不要直接生成完整程式碼，而是提供思路或 </a:t>
+            </a:r>
+            <a:r>
+              <a:rPr lang="en-US" altLang="zh-TW" dirty="0"/>
+              <a:t>pseudo-code</a:t>
+            </a:r>
+            <a:r>
+              <a:rPr lang="zh-TW" altLang="en-US" dirty="0"/>
+              <a:t>，實際功能撰寫仍然由我自己完成。</a:t>
+            </a:r>
+          </a:p>
+          <a:p>
+            <a:r>
+              <a:rPr lang="zh-TW" altLang="en-US" dirty="0"/>
+              <a:t>所以整體來說，</a:t>
+            </a:r>
+            <a:r>
+              <a:rPr lang="en-US" altLang="zh-TW" dirty="0"/>
+              <a:t>AI </a:t>
+            </a:r>
+            <a:r>
+              <a:rPr lang="zh-TW" altLang="en-US" dirty="0"/>
+              <a:t>在這個專題中比較像是輔助工具，主要幫助我提升視覺完成度、檢查盲點與釐清觀念，不是直接代替我完成整個作品。</a:t>
+            </a:r>
+          </a:p>
+          <a:p>
+            <a:endParaRPr lang="zh-TW" altLang="en-US" dirty="0"/>
           </a:p>
         </p:txBody>
       </p:sp>
@@ -898,10 +1405,7 @@
           <a:bodyPr/>
           <a:lstStyle/>
           <a:p>
-            <a:r>
-              <a:rPr lang="en-US" dirty="0"/>
-              <a:t>約 50 秒。這頁照四個困難講：功能架構、元件化、邊界條件、防禦性程式碼、Git commit 時機。要強調 AI 在這裡是協助我看見盲點，而不是直接替我完成整個專題。</a:t>
-            </a:r>
+            <a:endParaRPr lang="en-US" dirty="0"/>
           </a:p>
         </p:txBody>
       </p:sp>
@@ -985,10 +1489,7 @@
           <a:bodyPr/>
           <a:lstStyle/>
           <a:p>
-            <a:r>
-              <a:rPr lang="en-US" dirty="0"/>
-              <a:t>附錄頁。這頁通常不用講太久，若老師問資料來源或工具再快速帶過即可。</a:t>
-            </a:r>
+            <a:endParaRPr lang="en-US" dirty="0"/>
           </a:p>
         </p:txBody>
       </p:sp>
@@ -1419,6 +1920,13 @@
             <a:prstDash val="solid"/>
           </a:ln>
         </p:spPr>
+        <p:txBody>
+          <a:bodyPr/>
+          <a:lstStyle/>
+          <a:p>
+            <a:endParaRPr lang="zh-TW" altLang="en-US"/>
+          </a:p>
+        </p:txBody>
       </p:sp>
       <p:sp>
         <p:nvSpPr>
@@ -1448,6 +1956,13 @@
             <a:prstDash val="solid"/>
           </a:ln>
         </p:spPr>
+        <p:txBody>
+          <a:bodyPr/>
+          <a:lstStyle/>
+          <a:p>
+            <a:endParaRPr lang="zh-TW" altLang="en-US"/>
+          </a:p>
+        </p:txBody>
       </p:sp>
       <p:sp>
         <p:nvSpPr>
@@ -1473,6 +1988,13 @@
             <a:prstDash val="solid"/>
           </a:ln>
         </p:spPr>
+        <p:txBody>
+          <a:bodyPr/>
+          <a:lstStyle/>
+          <a:p>
+            <a:endParaRPr lang="zh-TW" altLang="en-US"/>
+          </a:p>
+        </p:txBody>
       </p:sp>
       <p:sp>
         <p:nvSpPr>
@@ -1504,6 +2026,13 @@
             <a:prstDash val="solid"/>
           </a:ln>
         </p:spPr>
+        <p:txBody>
+          <a:bodyPr/>
+          <a:lstStyle/>
+          <a:p>
+            <a:endParaRPr lang="zh-TW" altLang="en-US"/>
+          </a:p>
+        </p:txBody>
       </p:sp>
       <p:sp>
         <p:nvSpPr>
@@ -1574,6 +2103,13 @@
             <a:prstDash val="solid"/>
           </a:ln>
         </p:spPr>
+        <p:txBody>
+          <a:bodyPr/>
+          <a:lstStyle/>
+          <a:p>
+            <a:endParaRPr lang="zh-TW" altLang="en-US"/>
+          </a:p>
+        </p:txBody>
       </p:sp>
       <p:sp>
         <p:nvSpPr>
@@ -1644,6 +2180,13 @@
             <a:prstDash val="solid"/>
           </a:ln>
         </p:spPr>
+        <p:txBody>
+          <a:bodyPr/>
+          <a:lstStyle/>
+          <a:p>
+            <a:endParaRPr lang="zh-TW" altLang="en-US"/>
+          </a:p>
+        </p:txBody>
       </p:sp>
       <p:sp>
         <p:nvSpPr>
@@ -1934,6 +2477,13 @@
             <a:prstDash val="solid"/>
           </a:ln>
         </p:spPr>
+        <p:txBody>
+          <a:bodyPr/>
+          <a:lstStyle/>
+          <a:p>
+            <a:endParaRPr lang="zh-TW" altLang="en-US"/>
+          </a:p>
+        </p:txBody>
       </p:sp>
       <p:sp>
         <p:nvSpPr>
@@ -1969,6 +2519,13 @@
             <a:prstDash val="solid"/>
           </a:ln>
         </p:spPr>
+        <p:txBody>
+          <a:bodyPr/>
+          <a:lstStyle/>
+          <a:p>
+            <a:endParaRPr lang="zh-TW" altLang="en-US"/>
+          </a:p>
+        </p:txBody>
       </p:sp>
       <p:sp>
         <p:nvSpPr>
@@ -2046,6 +2603,13 @@
             <a:prstDash val="solid"/>
           </a:ln>
         </p:spPr>
+        <p:txBody>
+          <a:bodyPr/>
+          <a:lstStyle/>
+          <a:p>
+            <a:endParaRPr lang="zh-TW" altLang="en-US"/>
+          </a:p>
+        </p:txBody>
       </p:sp>
       <p:sp>
         <p:nvSpPr>
@@ -2081,6 +2645,13 @@
             <a:prstDash val="solid"/>
           </a:ln>
         </p:spPr>
+        <p:txBody>
+          <a:bodyPr/>
+          <a:lstStyle/>
+          <a:p>
+            <a:endParaRPr lang="zh-TW" altLang="en-US"/>
+          </a:p>
+        </p:txBody>
       </p:sp>
       <p:sp>
         <p:nvSpPr>
@@ -2116,6 +2687,13 @@
             <a:prstDash val="solid"/>
           </a:ln>
         </p:spPr>
+        <p:txBody>
+          <a:bodyPr/>
+          <a:lstStyle/>
+          <a:p>
+            <a:endParaRPr lang="zh-TW" altLang="en-US"/>
+          </a:p>
+        </p:txBody>
       </p:sp>
       <p:sp>
         <p:nvSpPr>
@@ -2151,6 +2729,13 @@
             <a:prstDash val="solid"/>
           </a:ln>
         </p:spPr>
+        <p:txBody>
+          <a:bodyPr/>
+          <a:lstStyle/>
+          <a:p>
+            <a:endParaRPr lang="zh-TW" altLang="en-US"/>
+          </a:p>
+        </p:txBody>
       </p:sp>
       <p:sp>
         <p:nvSpPr>
@@ -2228,6 +2813,13 @@
             <a:prstDash val="solid"/>
           </a:ln>
         </p:spPr>
+        <p:txBody>
+          <a:bodyPr/>
+          <a:lstStyle/>
+          <a:p>
+            <a:endParaRPr lang="zh-TW" altLang="en-US"/>
+          </a:p>
+        </p:txBody>
       </p:sp>
       <p:sp>
         <p:nvSpPr>
@@ -2263,6 +2855,13 @@
             <a:prstDash val="solid"/>
           </a:ln>
         </p:spPr>
+        <p:txBody>
+          <a:bodyPr/>
+          <a:lstStyle/>
+          <a:p>
+            <a:endParaRPr lang="zh-TW" altLang="en-US"/>
+          </a:p>
+        </p:txBody>
       </p:sp>
       <p:sp>
         <p:nvSpPr>
@@ -2298,6 +2897,13 @@
             <a:prstDash val="solid"/>
           </a:ln>
         </p:spPr>
+        <p:txBody>
+          <a:bodyPr/>
+          <a:lstStyle/>
+          <a:p>
+            <a:endParaRPr lang="zh-TW" altLang="en-US"/>
+          </a:p>
+        </p:txBody>
       </p:sp>
       <p:sp>
         <p:nvSpPr>
@@ -2333,6 +2939,13 @@
             <a:prstDash val="solid"/>
           </a:ln>
         </p:spPr>
+        <p:txBody>
+          <a:bodyPr/>
+          <a:lstStyle/>
+          <a:p>
+            <a:endParaRPr lang="zh-TW" altLang="en-US"/>
+          </a:p>
+        </p:txBody>
       </p:sp>
       <p:sp>
         <p:nvSpPr>
@@ -2410,6 +3023,13 @@
             <a:prstDash val="solid"/>
           </a:ln>
         </p:spPr>
+        <p:txBody>
+          <a:bodyPr/>
+          <a:lstStyle/>
+          <a:p>
+            <a:endParaRPr lang="zh-TW" altLang="en-US"/>
+          </a:p>
+        </p:txBody>
       </p:sp>
       <p:sp>
         <p:nvSpPr>
@@ -2445,6 +3065,13 @@
             <a:prstDash val="solid"/>
           </a:ln>
         </p:spPr>
+        <p:txBody>
+          <a:bodyPr/>
+          <a:lstStyle/>
+          <a:p>
+            <a:endParaRPr lang="zh-TW" altLang="en-US"/>
+          </a:p>
+        </p:txBody>
       </p:sp>
       <p:sp>
         <p:nvSpPr>
@@ -2556,6 +3183,13 @@
             <a:prstDash val="solid"/>
           </a:ln>
         </p:spPr>
+        <p:txBody>
+          <a:bodyPr/>
+          <a:lstStyle/>
+          <a:p>
+            <a:endParaRPr lang="zh-TW" altLang="en-US"/>
+          </a:p>
+        </p:txBody>
       </p:sp>
       <p:sp>
         <p:nvSpPr>
@@ -2581,6 +3215,13 @@
             <a:prstDash val="solid"/>
           </a:ln>
         </p:spPr>
+        <p:txBody>
+          <a:bodyPr/>
+          <a:lstStyle/>
+          <a:p>
+            <a:endParaRPr lang="zh-TW" altLang="en-US"/>
+          </a:p>
+        </p:txBody>
       </p:sp>
       <p:sp>
         <p:nvSpPr>
@@ -2604,6 +3245,13 @@
             <a:prstDash val="solid"/>
           </a:ln>
         </p:spPr>
+        <p:txBody>
+          <a:bodyPr/>
+          <a:lstStyle/>
+          <a:p>
+            <a:endParaRPr lang="zh-TW" altLang="en-US"/>
+          </a:p>
+        </p:txBody>
       </p:sp>
       <p:sp>
         <p:nvSpPr>
@@ -2748,6 +3396,13 @@
             <a:prstDash val="solid"/>
           </a:ln>
         </p:spPr>
+        <p:txBody>
+          <a:bodyPr/>
+          <a:lstStyle/>
+          <a:p>
+            <a:endParaRPr lang="zh-TW" altLang="en-US"/>
+          </a:p>
+        </p:txBody>
       </p:sp>
       <p:sp>
         <p:nvSpPr>
@@ -2857,6 +3512,13 @@
             <a:prstDash val="solid"/>
           </a:ln>
         </p:spPr>
+        <p:txBody>
+          <a:bodyPr/>
+          <a:lstStyle/>
+          <a:p>
+            <a:endParaRPr lang="zh-TW" altLang="en-US"/>
+          </a:p>
+        </p:txBody>
       </p:sp>
       <p:sp>
         <p:nvSpPr>
@@ -2882,6 +3544,13 @@
             <a:prstDash val="solid"/>
           </a:ln>
         </p:spPr>
+        <p:txBody>
+          <a:bodyPr/>
+          <a:lstStyle/>
+          <a:p>
+            <a:endParaRPr lang="zh-TW" altLang="en-US"/>
+          </a:p>
+        </p:txBody>
       </p:sp>
       <p:sp>
         <p:nvSpPr>
@@ -2989,6 +3658,13 @@
             <a:prstDash val="solid"/>
           </a:ln>
         </p:spPr>
+        <p:txBody>
+          <a:bodyPr/>
+          <a:lstStyle/>
+          <a:p>
+            <a:endParaRPr lang="zh-TW" altLang="en-US"/>
+          </a:p>
+        </p:txBody>
       </p:sp>
       <p:sp>
         <p:nvSpPr>
@@ -3014,6 +3690,13 @@
             <a:prstDash val="solid"/>
           </a:ln>
         </p:spPr>
+        <p:txBody>
+          <a:bodyPr/>
+          <a:lstStyle/>
+          <a:p>
+            <a:endParaRPr lang="zh-TW" altLang="en-US"/>
+          </a:p>
+        </p:txBody>
       </p:sp>
       <p:sp>
         <p:nvSpPr>
@@ -3121,6 +3804,13 @@
             <a:prstDash val="solid"/>
           </a:ln>
         </p:spPr>
+        <p:txBody>
+          <a:bodyPr/>
+          <a:lstStyle/>
+          <a:p>
+            <a:endParaRPr lang="zh-TW" altLang="en-US"/>
+          </a:p>
+        </p:txBody>
       </p:sp>
       <p:sp>
         <p:nvSpPr>
@@ -3146,6 +3836,13 @@
             <a:prstDash val="solid"/>
           </a:ln>
         </p:spPr>
+        <p:txBody>
+          <a:bodyPr/>
+          <a:lstStyle/>
+          <a:p>
+            <a:endParaRPr lang="zh-TW" altLang="en-US"/>
+          </a:p>
+        </p:txBody>
       </p:sp>
       <p:sp>
         <p:nvSpPr>
@@ -3253,6 +3950,13 @@
             <a:prstDash val="solid"/>
           </a:ln>
         </p:spPr>
+        <p:txBody>
+          <a:bodyPr/>
+          <a:lstStyle/>
+          <a:p>
+            <a:endParaRPr lang="zh-TW" altLang="en-US"/>
+          </a:p>
+        </p:txBody>
       </p:sp>
       <p:sp>
         <p:nvSpPr>
@@ -3278,6 +3982,13 @@
             <a:prstDash val="solid"/>
           </a:ln>
         </p:spPr>
+        <p:txBody>
+          <a:bodyPr/>
+          <a:lstStyle/>
+          <a:p>
+            <a:endParaRPr lang="zh-TW" altLang="en-US"/>
+          </a:p>
+        </p:txBody>
       </p:sp>
       <p:sp>
         <p:nvSpPr>
@@ -3387,6 +4098,13 @@
             <a:prstDash val="solid"/>
           </a:ln>
         </p:spPr>
+        <p:txBody>
+          <a:bodyPr/>
+          <a:lstStyle/>
+          <a:p>
+            <a:endParaRPr lang="zh-TW" altLang="en-US"/>
+          </a:p>
+        </p:txBody>
       </p:sp>
       <p:sp>
         <p:nvSpPr>
@@ -3451,6 +4169,13 @@
             <a:prstDash val="solid"/>
           </a:ln>
         </p:spPr>
+        <p:txBody>
+          <a:bodyPr/>
+          <a:lstStyle/>
+          <a:p>
+            <a:endParaRPr lang="zh-TW" altLang="en-US"/>
+          </a:p>
+        </p:txBody>
       </p:sp>
       <p:sp>
         <p:nvSpPr>
@@ -3480,6 +4205,13 @@
             <a:prstDash val="solid"/>
           </a:ln>
         </p:spPr>
+        <p:txBody>
+          <a:bodyPr/>
+          <a:lstStyle/>
+          <a:p>
+            <a:endParaRPr lang="zh-TW" altLang="en-US"/>
+          </a:p>
+        </p:txBody>
       </p:sp>
       <p:sp>
         <p:nvSpPr>
@@ -3544,6 +4276,13 @@
             <a:prstDash val="solid"/>
           </a:ln>
         </p:spPr>
+        <p:txBody>
+          <a:bodyPr/>
+          <a:lstStyle/>
+          <a:p>
+            <a:endParaRPr lang="zh-TW" altLang="en-US"/>
+          </a:p>
+        </p:txBody>
       </p:sp>
       <p:sp>
         <p:nvSpPr>
@@ -3573,6 +4312,13 @@
             <a:prstDash val="solid"/>
           </a:ln>
         </p:spPr>
+        <p:txBody>
+          <a:bodyPr/>
+          <a:lstStyle/>
+          <a:p>
+            <a:endParaRPr lang="zh-TW" altLang="en-US"/>
+          </a:p>
+        </p:txBody>
       </p:sp>
       <p:sp>
         <p:nvSpPr>
@@ -3637,6 +4383,13 @@
             <a:prstDash val="solid"/>
           </a:ln>
         </p:spPr>
+        <p:txBody>
+          <a:bodyPr/>
+          <a:lstStyle/>
+          <a:p>
+            <a:endParaRPr lang="zh-TW" altLang="en-US"/>
+          </a:p>
+        </p:txBody>
       </p:sp>
       <p:sp>
         <p:nvSpPr>
@@ -3666,6 +4419,13 @@
             <a:prstDash val="solid"/>
           </a:ln>
         </p:spPr>
+        <p:txBody>
+          <a:bodyPr/>
+          <a:lstStyle/>
+          <a:p>
+            <a:endParaRPr lang="zh-TW" altLang="en-US"/>
+          </a:p>
+        </p:txBody>
       </p:sp>
       <p:sp>
         <p:nvSpPr>
@@ -3763,6 +4523,13 @@
             <a:prstDash val="solid"/>
           </a:ln>
         </p:spPr>
+        <p:txBody>
+          <a:bodyPr/>
+          <a:lstStyle/>
+          <a:p>
+            <a:endParaRPr lang="zh-TW" altLang="en-US"/>
+          </a:p>
+        </p:txBody>
       </p:sp>
       <p:sp>
         <p:nvSpPr>
@@ -3788,6 +4555,13 @@
             <a:prstDash val="solid"/>
           </a:ln>
         </p:spPr>
+        <p:txBody>
+          <a:bodyPr/>
+          <a:lstStyle/>
+          <a:p>
+            <a:endParaRPr lang="zh-TW" altLang="en-US"/>
+          </a:p>
+        </p:txBody>
       </p:sp>
       <p:sp>
         <p:nvSpPr>
@@ -3811,6 +4585,13 @@
             <a:prstDash val="solid"/>
           </a:ln>
         </p:spPr>
+        <p:txBody>
+          <a:bodyPr/>
+          <a:lstStyle/>
+          <a:p>
+            <a:endParaRPr lang="zh-TW" altLang="en-US"/>
+          </a:p>
+        </p:txBody>
       </p:sp>
       <p:sp>
         <p:nvSpPr>
@@ -4103,6 +4884,13 @@
             <a:prstDash val="solid"/>
           </a:ln>
         </p:spPr>
+        <p:txBody>
+          <a:bodyPr/>
+          <a:lstStyle/>
+          <a:p>
+            <a:endParaRPr lang="zh-TW" altLang="en-US"/>
+          </a:p>
+        </p:txBody>
       </p:sp>
       <p:sp>
         <p:nvSpPr>
@@ -4208,6 +4996,13 @@
             <a:prstDash val="solid"/>
           </a:ln>
         </p:spPr>
+        <p:txBody>
+          <a:bodyPr/>
+          <a:lstStyle/>
+          <a:p>
+            <a:endParaRPr lang="zh-TW" altLang="en-US"/>
+          </a:p>
+        </p:txBody>
       </p:sp>
       <p:sp>
         <p:nvSpPr>
@@ -4235,6 +5030,13 @@
             <a:prstDash val="solid"/>
           </a:ln>
         </p:spPr>
+        <p:txBody>
+          <a:bodyPr/>
+          <a:lstStyle/>
+          <a:p>
+            <a:endParaRPr lang="zh-TW" altLang="en-US"/>
+          </a:p>
+        </p:txBody>
       </p:sp>
       <p:sp>
         <p:nvSpPr>
@@ -4340,6 +5142,13 @@
             <a:prstDash val="solid"/>
           </a:ln>
         </p:spPr>
+        <p:txBody>
+          <a:bodyPr/>
+          <a:lstStyle/>
+          <a:p>
+            <a:endParaRPr lang="zh-TW" altLang="en-US"/>
+          </a:p>
+        </p:txBody>
       </p:sp>
       <p:sp>
         <p:nvSpPr>
@@ -4367,6 +5176,13 @@
             <a:prstDash val="solid"/>
           </a:ln>
         </p:spPr>
+        <p:txBody>
+          <a:bodyPr/>
+          <a:lstStyle/>
+          <a:p>
+            <a:endParaRPr lang="zh-TW" altLang="en-US"/>
+          </a:p>
+        </p:txBody>
       </p:sp>
       <p:sp>
         <p:nvSpPr>
@@ -4472,6 +5288,13 @@
             <a:prstDash val="solid"/>
           </a:ln>
         </p:spPr>
+        <p:txBody>
+          <a:bodyPr/>
+          <a:lstStyle/>
+          <a:p>
+            <a:endParaRPr lang="zh-TW" altLang="en-US"/>
+          </a:p>
+        </p:txBody>
       </p:sp>
       <p:sp>
         <p:nvSpPr>
@@ -4499,6 +5322,13 @@
             <a:prstDash val="solid"/>
           </a:ln>
         </p:spPr>
+        <p:txBody>
+          <a:bodyPr/>
+          <a:lstStyle/>
+          <a:p>
+            <a:endParaRPr lang="zh-TW" altLang="en-US"/>
+          </a:p>
+        </p:txBody>
       </p:sp>
       <p:sp>
         <p:nvSpPr>
@@ -4604,6 +5434,13 @@
             <a:prstDash val="solid"/>
           </a:ln>
         </p:spPr>
+        <p:txBody>
+          <a:bodyPr/>
+          <a:lstStyle/>
+          <a:p>
+            <a:endParaRPr lang="zh-TW" altLang="en-US"/>
+          </a:p>
+        </p:txBody>
       </p:sp>
       <p:sp>
         <p:nvSpPr>
@@ -4631,6 +5468,13 @@
             <a:prstDash val="solid"/>
           </a:ln>
         </p:spPr>
+        <p:txBody>
+          <a:bodyPr/>
+          <a:lstStyle/>
+          <a:p>
+            <a:endParaRPr lang="zh-TW" altLang="en-US"/>
+          </a:p>
+        </p:txBody>
       </p:sp>
       <p:sp>
         <p:nvSpPr>
@@ -4738,6 +5582,13 @@
             <a:prstDash val="solid"/>
           </a:ln>
         </p:spPr>
+        <p:txBody>
+          <a:bodyPr/>
+          <a:lstStyle/>
+          <a:p>
+            <a:endParaRPr lang="zh-TW" altLang="en-US"/>
+          </a:p>
+        </p:txBody>
       </p:sp>
       <p:sp>
         <p:nvSpPr>
@@ -4763,6 +5614,13 @@
             <a:prstDash val="solid"/>
           </a:ln>
         </p:spPr>
+        <p:txBody>
+          <a:bodyPr/>
+          <a:lstStyle/>
+          <a:p>
+            <a:endParaRPr lang="zh-TW" altLang="en-US"/>
+          </a:p>
+        </p:txBody>
       </p:sp>
       <p:sp>
         <p:nvSpPr>
@@ -4870,6 +5728,13 @@
             <a:prstDash val="solid"/>
           </a:ln>
         </p:spPr>
+        <p:txBody>
+          <a:bodyPr/>
+          <a:lstStyle/>
+          <a:p>
+            <a:endParaRPr lang="zh-TW" altLang="en-US"/>
+          </a:p>
+        </p:txBody>
       </p:sp>
       <p:sp>
         <p:nvSpPr>
@@ -4895,6 +5760,13 @@
             <a:prstDash val="solid"/>
           </a:ln>
         </p:spPr>
+        <p:txBody>
+          <a:bodyPr/>
+          <a:lstStyle/>
+          <a:p>
+            <a:endParaRPr lang="zh-TW" altLang="en-US"/>
+          </a:p>
+        </p:txBody>
       </p:sp>
       <p:sp>
         <p:nvSpPr>
@@ -5002,6 +5874,13 @@
             <a:prstDash val="solid"/>
           </a:ln>
         </p:spPr>
+        <p:txBody>
+          <a:bodyPr/>
+          <a:lstStyle/>
+          <a:p>
+            <a:endParaRPr lang="zh-TW" altLang="en-US"/>
+          </a:p>
+        </p:txBody>
       </p:sp>
       <p:sp>
         <p:nvSpPr>
@@ -5027,6 +5906,13 @@
             <a:prstDash val="solid"/>
           </a:ln>
         </p:spPr>
+        <p:txBody>
+          <a:bodyPr/>
+          <a:lstStyle/>
+          <a:p>
+            <a:endParaRPr lang="zh-TW" altLang="en-US"/>
+          </a:p>
+        </p:txBody>
       </p:sp>
       <p:sp>
         <p:nvSpPr>
@@ -5165,6 +6051,13 @@
             <a:prstDash val="solid"/>
           </a:ln>
         </p:spPr>
+        <p:txBody>
+          <a:bodyPr/>
+          <a:lstStyle/>
+          <a:p>
+            <a:endParaRPr lang="zh-TW" altLang="en-US"/>
+          </a:p>
+        </p:txBody>
       </p:sp>
       <p:sp>
         <p:nvSpPr>
@@ -5190,6 +6083,13 @@
             <a:prstDash val="solid"/>
           </a:ln>
         </p:spPr>
+        <p:txBody>
+          <a:bodyPr/>
+          <a:lstStyle/>
+          <a:p>
+            <a:endParaRPr lang="zh-TW" altLang="en-US"/>
+          </a:p>
+        </p:txBody>
       </p:sp>
       <p:sp>
         <p:nvSpPr>
@@ -5213,6 +6113,13 @@
             <a:prstDash val="solid"/>
           </a:ln>
         </p:spPr>
+        <p:txBody>
+          <a:bodyPr/>
+          <a:lstStyle/>
+          <a:p>
+            <a:endParaRPr lang="zh-TW" altLang="en-US"/>
+          </a:p>
+        </p:txBody>
       </p:sp>
       <p:sp>
         <p:nvSpPr>
@@ -5239,7 +6146,7 @@
               <a:buNone/>
             </a:pPr>
             <a:r>
-              <a:rPr lang="en-US" sz="2400" b="1" dirty="0">
+              <a:rPr lang="zh-TW" altLang="en-US" sz="2400" b="1" dirty="0">
                 <a:solidFill>
                   <a:srgbClr val="F3F4F6"/>
                 </a:solidFill>
@@ -5247,7 +6154,7 @@
                 <a:ea typeface="Microsoft JhengHei" pitchFamily="34" charset="-122"/>
                 <a:cs typeface="Microsoft JhengHei" pitchFamily="34" charset="-120"/>
               </a:rPr>
-              <a:t>時程規劃</a:t>
+              <a:t>實際開發時程</a:t>
             </a:r>
             <a:endParaRPr lang="en-US" sz="2400" dirty="0"/>
           </a:p>
@@ -5359,6 +6266,13 @@
             <a:prstDash val="solid"/>
           </a:ln>
         </p:spPr>
+        <p:txBody>
+          <a:bodyPr/>
+          <a:lstStyle/>
+          <a:p>
+            <a:endParaRPr lang="zh-TW" altLang="en-US"/>
+          </a:p>
+        </p:txBody>
       </p:sp>
       <p:sp>
         <p:nvSpPr>
@@ -5499,6 +6413,13 @@
             <a:prstDash val="solid"/>
           </a:ln>
         </p:spPr>
+        <p:txBody>
+          <a:bodyPr/>
+          <a:lstStyle/>
+          <a:p>
+            <a:endParaRPr lang="zh-TW" altLang="en-US"/>
+          </a:p>
+        </p:txBody>
       </p:sp>
       <p:sp>
         <p:nvSpPr>
@@ -5524,6 +6445,13 @@
             <a:prstDash val="solid"/>
           </a:ln>
         </p:spPr>
+        <p:txBody>
+          <a:bodyPr/>
+          <a:lstStyle/>
+          <a:p>
+            <a:endParaRPr lang="zh-TW" altLang="en-US"/>
+          </a:p>
+        </p:txBody>
       </p:sp>
       <p:sp>
         <p:nvSpPr>
@@ -5547,6 +6475,13 @@
             <a:prstDash val="solid"/>
           </a:ln>
         </p:spPr>
+        <p:txBody>
+          <a:bodyPr/>
+          <a:lstStyle/>
+          <a:p>
+            <a:endParaRPr lang="zh-TW" altLang="en-US"/>
+          </a:p>
+        </p:txBody>
       </p:sp>
       <p:sp>
         <p:nvSpPr>
@@ -5730,6 +6665,13 @@
             <a:prstDash val="solid"/>
           </a:ln>
         </p:spPr>
+        <p:txBody>
+          <a:bodyPr/>
+          <a:lstStyle/>
+          <a:p>
+            <a:endParaRPr lang="zh-TW" altLang="en-US"/>
+          </a:p>
+        </p:txBody>
       </p:sp>
       <p:sp>
         <p:nvSpPr>
@@ -5755,6 +6697,13 @@
             <a:prstDash val="solid"/>
           </a:ln>
         </p:spPr>
+        <p:txBody>
+          <a:bodyPr/>
+          <a:lstStyle/>
+          <a:p>
+            <a:endParaRPr lang="zh-TW" altLang="en-US"/>
+          </a:p>
+        </p:txBody>
       </p:sp>
       <p:sp>
         <p:nvSpPr>
@@ -5780,6 +6729,13 @@
             <a:prstDash val="solid"/>
           </a:ln>
         </p:spPr>
+        <p:txBody>
+          <a:bodyPr/>
+          <a:lstStyle/>
+          <a:p>
+            <a:endParaRPr lang="zh-TW" altLang="en-US"/>
+          </a:p>
+        </p:txBody>
       </p:sp>
       <p:sp>
         <p:nvSpPr>
@@ -5805,6 +6761,13 @@
             <a:prstDash val="solid"/>
           </a:ln>
         </p:spPr>
+        <p:txBody>
+          <a:bodyPr/>
+          <a:lstStyle/>
+          <a:p>
+            <a:endParaRPr lang="zh-TW" altLang="en-US"/>
+          </a:p>
+        </p:txBody>
       </p:sp>
       <p:sp>
         <p:nvSpPr>
@@ -5830,6 +6793,13 @@
             <a:prstDash val="solid"/>
           </a:ln>
         </p:spPr>
+        <p:txBody>
+          <a:bodyPr/>
+          <a:lstStyle/>
+          <a:p>
+            <a:endParaRPr lang="zh-TW" altLang="en-US"/>
+          </a:p>
+        </p:txBody>
       </p:sp>
       <p:pic>
         <p:nvPicPr>
@@ -5881,6 +6851,13 @@
             <a:prstDash val="solid"/>
           </a:ln>
         </p:spPr>
+        <p:txBody>
+          <a:bodyPr/>
+          <a:lstStyle/>
+          <a:p>
+            <a:endParaRPr lang="zh-TW" altLang="en-US"/>
+          </a:p>
+        </p:txBody>
       </p:sp>
       <p:sp>
         <p:nvSpPr>
@@ -5906,6 +6883,13 @@
             <a:prstDash val="solid"/>
           </a:ln>
         </p:spPr>
+        <p:txBody>
+          <a:bodyPr/>
+          <a:lstStyle/>
+          <a:p>
+            <a:endParaRPr lang="zh-TW" altLang="en-US"/>
+          </a:p>
+        </p:txBody>
       </p:sp>
       <p:sp>
         <p:nvSpPr>
@@ -5931,6 +6915,13 @@
             <a:prstDash val="solid"/>
           </a:ln>
         </p:spPr>
+        <p:txBody>
+          <a:bodyPr/>
+          <a:lstStyle/>
+          <a:p>
+            <a:endParaRPr lang="zh-TW" altLang="en-US"/>
+          </a:p>
+        </p:txBody>
       </p:sp>
       <p:sp>
         <p:nvSpPr>
@@ -5956,6 +6947,13 @@
             <a:prstDash val="solid"/>
           </a:ln>
         </p:spPr>
+        <p:txBody>
+          <a:bodyPr/>
+          <a:lstStyle/>
+          <a:p>
+            <a:endParaRPr lang="zh-TW" altLang="en-US"/>
+          </a:p>
+        </p:txBody>
       </p:sp>
       <p:sp>
         <p:nvSpPr>
@@ -5981,6 +6979,13 @@
             <a:prstDash val="solid"/>
           </a:ln>
         </p:spPr>
+        <p:txBody>
+          <a:bodyPr/>
+          <a:lstStyle/>
+          <a:p>
+            <a:endParaRPr lang="zh-TW" altLang="en-US"/>
+          </a:p>
+        </p:txBody>
       </p:sp>
       <p:pic>
         <p:nvPicPr>
@@ -6032,6 +7037,13 @@
             <a:prstDash val="solid"/>
           </a:ln>
         </p:spPr>
+        <p:txBody>
+          <a:bodyPr/>
+          <a:lstStyle/>
+          <a:p>
+            <a:endParaRPr lang="zh-TW" altLang="en-US"/>
+          </a:p>
+        </p:txBody>
       </p:sp>
       <p:sp>
         <p:nvSpPr>
@@ -6057,6 +7069,13 @@
             <a:prstDash val="solid"/>
           </a:ln>
         </p:spPr>
+        <p:txBody>
+          <a:bodyPr/>
+          <a:lstStyle/>
+          <a:p>
+            <a:endParaRPr lang="zh-TW" altLang="en-US"/>
+          </a:p>
+        </p:txBody>
       </p:sp>
       <p:sp>
         <p:nvSpPr>
@@ -6164,6 +7183,13 @@
             <a:prstDash val="solid"/>
           </a:ln>
         </p:spPr>
+        <p:txBody>
+          <a:bodyPr/>
+          <a:lstStyle/>
+          <a:p>
+            <a:endParaRPr lang="zh-TW" altLang="en-US"/>
+          </a:p>
+        </p:txBody>
       </p:sp>
       <p:sp>
         <p:nvSpPr>
@@ -6189,6 +7215,13 @@
             <a:prstDash val="solid"/>
           </a:ln>
         </p:spPr>
+        <p:txBody>
+          <a:bodyPr/>
+          <a:lstStyle/>
+          <a:p>
+            <a:endParaRPr lang="zh-TW" altLang="en-US"/>
+          </a:p>
+        </p:txBody>
       </p:sp>
       <p:sp>
         <p:nvSpPr>
@@ -6296,6 +7329,13 @@
             <a:prstDash val="solid"/>
           </a:ln>
         </p:spPr>
+        <p:txBody>
+          <a:bodyPr/>
+          <a:lstStyle/>
+          <a:p>
+            <a:endParaRPr lang="zh-TW" altLang="en-US"/>
+          </a:p>
+        </p:txBody>
       </p:sp>
       <p:sp>
         <p:nvSpPr>
@@ -6321,6 +7361,13 @@
             <a:prstDash val="solid"/>
           </a:ln>
         </p:spPr>
+        <p:txBody>
+          <a:bodyPr/>
+          <a:lstStyle/>
+          <a:p>
+            <a:endParaRPr lang="zh-TW" altLang="en-US"/>
+          </a:p>
+        </p:txBody>
       </p:sp>
       <p:sp>
         <p:nvSpPr>
@@ -6428,6 +7475,13 @@
             <a:prstDash val="solid"/>
           </a:ln>
         </p:spPr>
+        <p:txBody>
+          <a:bodyPr/>
+          <a:lstStyle/>
+          <a:p>
+            <a:endParaRPr lang="zh-TW" altLang="en-US"/>
+          </a:p>
+        </p:txBody>
       </p:sp>
       <p:sp>
         <p:nvSpPr>
@@ -6453,6 +7507,13 @@
             <a:prstDash val="solid"/>
           </a:ln>
         </p:spPr>
+        <p:txBody>
+          <a:bodyPr/>
+          <a:lstStyle/>
+          <a:p>
+            <a:endParaRPr lang="zh-TW" altLang="en-US"/>
+          </a:p>
+        </p:txBody>
       </p:sp>
       <p:sp>
         <p:nvSpPr>
@@ -6591,6 +7652,13 @@
             <a:prstDash val="solid"/>
           </a:ln>
         </p:spPr>
+        <p:txBody>
+          <a:bodyPr/>
+          <a:lstStyle/>
+          <a:p>
+            <a:endParaRPr lang="zh-TW" altLang="en-US"/>
+          </a:p>
+        </p:txBody>
       </p:sp>
       <p:sp>
         <p:nvSpPr>
@@ -6616,6 +7684,13 @@
             <a:prstDash val="solid"/>
           </a:ln>
         </p:spPr>
+        <p:txBody>
+          <a:bodyPr/>
+          <a:lstStyle/>
+          <a:p>
+            <a:endParaRPr lang="zh-TW" altLang="en-US"/>
+          </a:p>
+        </p:txBody>
       </p:sp>
       <p:sp>
         <p:nvSpPr>
@@ -6639,6 +7714,13 @@
             <a:prstDash val="solid"/>
           </a:ln>
         </p:spPr>
+        <p:txBody>
+          <a:bodyPr/>
+          <a:lstStyle/>
+          <a:p>
+            <a:endParaRPr lang="zh-TW" altLang="en-US"/>
+          </a:p>
+        </p:txBody>
       </p:sp>
       <p:sp>
         <p:nvSpPr>
@@ -6783,6 +7865,13 @@
             <a:prstDash val="solid"/>
           </a:ln>
         </p:spPr>
+        <p:txBody>
+          <a:bodyPr/>
+          <a:lstStyle/>
+          <a:p>
+            <a:endParaRPr lang="zh-TW" altLang="en-US"/>
+          </a:p>
+        </p:txBody>
       </p:sp>
       <p:sp>
         <p:nvSpPr>
@@ -6808,6 +7897,13 @@
             <a:prstDash val="solid"/>
           </a:ln>
         </p:spPr>
+        <p:txBody>
+          <a:bodyPr/>
+          <a:lstStyle/>
+          <a:p>
+            <a:endParaRPr lang="zh-TW" altLang="en-US"/>
+          </a:p>
+        </p:txBody>
       </p:sp>
       <p:sp>
         <p:nvSpPr>
@@ -6950,6 +8046,13 @@
             <a:prstDash val="solid"/>
           </a:ln>
         </p:spPr>
+        <p:txBody>
+          <a:bodyPr/>
+          <a:lstStyle/>
+          <a:p>
+            <a:endParaRPr lang="zh-TW" altLang="en-US"/>
+          </a:p>
+        </p:txBody>
       </p:sp>
       <p:sp>
         <p:nvSpPr>
@@ -7092,6 +8195,13 @@
             <a:prstDash val="solid"/>
           </a:ln>
         </p:spPr>
+        <p:txBody>
+          <a:bodyPr/>
+          <a:lstStyle/>
+          <a:p>
+            <a:endParaRPr lang="zh-TW" altLang="en-US"/>
+          </a:p>
+        </p:txBody>
       </p:sp>
       <p:sp>
         <p:nvSpPr>
@@ -7234,6 +8344,13 @@
             <a:prstDash val="solid"/>
           </a:ln>
         </p:spPr>
+        <p:txBody>
+          <a:bodyPr/>
+          <a:lstStyle/>
+          <a:p>
+            <a:endParaRPr lang="zh-TW" altLang="en-US"/>
+          </a:p>
+        </p:txBody>
       </p:sp>
       <p:sp>
         <p:nvSpPr>
@@ -7376,6 +8493,13 @@
             <a:prstDash val="solid"/>
           </a:ln>
         </p:spPr>
+        <p:txBody>
+          <a:bodyPr/>
+          <a:lstStyle/>
+          <a:p>
+            <a:endParaRPr lang="zh-TW" altLang="en-US"/>
+          </a:p>
+        </p:txBody>
       </p:sp>
       <p:sp>
         <p:nvSpPr>
@@ -7551,6 +8675,13 @@
             <a:prstDash val="solid"/>
           </a:ln>
         </p:spPr>
+        <p:txBody>
+          <a:bodyPr/>
+          <a:lstStyle/>
+          <a:p>
+            <a:endParaRPr lang="zh-TW" altLang="en-US"/>
+          </a:p>
+        </p:txBody>
       </p:sp>
       <p:sp>
         <p:nvSpPr>
@@ -7576,6 +8707,13 @@
             <a:prstDash val="solid"/>
           </a:ln>
         </p:spPr>
+        <p:txBody>
+          <a:bodyPr/>
+          <a:lstStyle/>
+          <a:p>
+            <a:endParaRPr lang="zh-TW" altLang="en-US"/>
+          </a:p>
+        </p:txBody>
       </p:sp>
       <p:sp>
         <p:nvSpPr>
@@ -7599,6 +8737,13 @@
             <a:prstDash val="solid"/>
           </a:ln>
         </p:spPr>
+        <p:txBody>
+          <a:bodyPr/>
+          <a:lstStyle/>
+          <a:p>
+            <a:endParaRPr lang="zh-TW" altLang="en-US"/>
+          </a:p>
+        </p:txBody>
       </p:sp>
       <p:sp>
         <p:nvSpPr>
@@ -7906,6 +9051,13 @@
             <a:prstDash val="solid"/>
           </a:ln>
         </p:spPr>
+        <p:txBody>
+          <a:bodyPr/>
+          <a:lstStyle/>
+          <a:p>
+            <a:endParaRPr lang="zh-TW" altLang="en-US"/>
+          </a:p>
+        </p:txBody>
       </p:sp>
       <p:sp>
         <p:nvSpPr>
@@ -7933,6 +9085,13 @@
             <a:prstDash val="solid"/>
           </a:ln>
         </p:spPr>
+        <p:txBody>
+          <a:bodyPr/>
+          <a:lstStyle/>
+          <a:p>
+            <a:endParaRPr lang="zh-TW" altLang="en-US"/>
+          </a:p>
+        </p:txBody>
       </p:sp>
       <p:sp>
         <p:nvSpPr>
@@ -8134,6 +9293,13 @@
             <a:prstDash val="solid"/>
           </a:ln>
         </p:spPr>
+        <p:txBody>
+          <a:bodyPr/>
+          <a:lstStyle/>
+          <a:p>
+            <a:endParaRPr lang="zh-TW" altLang="en-US"/>
+          </a:p>
+        </p:txBody>
       </p:sp>
       <p:sp>
         <p:nvSpPr>
@@ -8161,6 +9327,13 @@
             <a:prstDash val="solid"/>
           </a:ln>
         </p:spPr>
+        <p:txBody>
+          <a:bodyPr/>
+          <a:lstStyle/>
+          <a:p>
+            <a:endParaRPr lang="zh-TW" altLang="en-US"/>
+          </a:p>
+        </p:txBody>
       </p:sp>
       <p:sp>
         <p:nvSpPr>
@@ -8373,6 +9546,13 @@
             <a:prstDash val="solid"/>
           </a:ln>
         </p:spPr>
+        <p:txBody>
+          <a:bodyPr/>
+          <a:lstStyle/>
+          <a:p>
+            <a:endParaRPr lang="zh-TW" altLang="en-US"/>
+          </a:p>
+        </p:txBody>
       </p:sp>
       <p:sp>
         <p:nvSpPr>
@@ -8400,6 +9580,13 @@
             <a:prstDash val="solid"/>
           </a:ln>
         </p:spPr>
+        <p:txBody>
+          <a:bodyPr/>
+          <a:lstStyle/>
+          <a:p>
+            <a:endParaRPr lang="zh-TW" altLang="en-US"/>
+          </a:p>
+        </p:txBody>
       </p:sp>
       <p:sp>
         <p:nvSpPr>
@@ -8540,6 +9727,13 @@
             <a:prstDash val="solid"/>
           </a:ln>
         </p:spPr>
+        <p:txBody>
+          <a:bodyPr/>
+          <a:lstStyle/>
+          <a:p>
+            <a:endParaRPr lang="zh-TW" altLang="en-US"/>
+          </a:p>
+        </p:txBody>
       </p:sp>
       <p:sp>
         <p:nvSpPr>
@@ -8565,6 +9759,13 @@
             <a:prstDash val="solid"/>
           </a:ln>
         </p:spPr>
+        <p:txBody>
+          <a:bodyPr/>
+          <a:lstStyle/>
+          <a:p>
+            <a:endParaRPr lang="zh-TW" altLang="en-US"/>
+          </a:p>
+        </p:txBody>
       </p:sp>
       <p:sp>
         <p:nvSpPr>
@@ -8791,6 +9992,13 @@
             <a:prstDash val="solid"/>
           </a:ln>
         </p:spPr>
+        <p:txBody>
+          <a:bodyPr/>
+          <a:lstStyle/>
+          <a:p>
+            <a:endParaRPr lang="zh-TW" altLang="en-US"/>
+          </a:p>
+        </p:txBody>
       </p:sp>
       <p:sp>
         <p:nvSpPr>
@@ -8816,6 +10024,13 @@
             <a:prstDash val="solid"/>
           </a:ln>
         </p:spPr>
+        <p:txBody>
+          <a:bodyPr/>
+          <a:lstStyle/>
+          <a:p>
+            <a:endParaRPr lang="zh-TW" altLang="en-US"/>
+          </a:p>
+        </p:txBody>
       </p:sp>
       <p:sp>
         <p:nvSpPr>
@@ -8839,6 +10054,13 @@
             <a:prstDash val="solid"/>
           </a:ln>
         </p:spPr>
+        <p:txBody>
+          <a:bodyPr/>
+          <a:lstStyle/>
+          <a:p>
+            <a:endParaRPr lang="zh-TW" altLang="en-US"/>
+          </a:p>
+        </p:txBody>
       </p:sp>
       <p:sp>
         <p:nvSpPr>
@@ -8983,6 +10205,13 @@
             <a:prstDash val="solid"/>
           </a:ln>
         </p:spPr>
+        <p:txBody>
+          <a:bodyPr/>
+          <a:lstStyle/>
+          <a:p>
+            <a:endParaRPr lang="zh-TW" altLang="en-US"/>
+          </a:p>
+        </p:txBody>
       </p:sp>
       <p:sp>
         <p:nvSpPr>
@@ -9008,6 +10237,13 @@
             <a:prstDash val="solid"/>
           </a:ln>
         </p:spPr>
+        <p:txBody>
+          <a:bodyPr/>
+          <a:lstStyle/>
+          <a:p>
+            <a:endParaRPr lang="zh-TW" altLang="en-US"/>
+          </a:p>
+        </p:txBody>
       </p:sp>
       <p:sp>
         <p:nvSpPr>
@@ -9150,6 +10386,13 @@
             <a:prstDash val="solid"/>
           </a:ln>
         </p:spPr>
+        <p:txBody>
+          <a:bodyPr/>
+          <a:lstStyle/>
+          <a:p>
+            <a:endParaRPr lang="zh-TW" altLang="en-US"/>
+          </a:p>
+        </p:txBody>
       </p:sp>
       <p:sp>
         <p:nvSpPr>
@@ -9175,6 +10418,13 @@
             <a:prstDash val="solid"/>
           </a:ln>
         </p:spPr>
+        <p:txBody>
+          <a:bodyPr/>
+          <a:lstStyle/>
+          <a:p>
+            <a:endParaRPr lang="zh-TW" altLang="en-US"/>
+          </a:p>
+        </p:txBody>
       </p:sp>
       <p:sp>
         <p:nvSpPr>
@@ -9284,6 +10534,13 @@
             <a:prstDash val="solid"/>
           </a:ln>
         </p:spPr>
+        <p:txBody>
+          <a:bodyPr/>
+          <a:lstStyle/>
+          <a:p>
+            <a:endParaRPr lang="zh-TW" altLang="en-US"/>
+          </a:p>
+        </p:txBody>
       </p:sp>
       <p:sp>
         <p:nvSpPr>
@@ -9309,6 +10566,13 @@
             <a:prstDash val="solid"/>
           </a:ln>
         </p:spPr>
+        <p:txBody>
+          <a:bodyPr/>
+          <a:lstStyle/>
+          <a:p>
+            <a:endParaRPr lang="zh-TW" altLang="en-US"/>
+          </a:p>
+        </p:txBody>
       </p:sp>
       <p:sp>
         <p:nvSpPr>
@@ -9418,6 +10682,13 @@
             <a:prstDash val="solid"/>
           </a:ln>
         </p:spPr>
+        <p:txBody>
+          <a:bodyPr/>
+          <a:lstStyle/>
+          <a:p>
+            <a:endParaRPr lang="zh-TW" altLang="en-US"/>
+          </a:p>
+        </p:txBody>
       </p:sp>
       <p:sp>
         <p:nvSpPr>
@@ -9443,6 +10714,13 @@
             <a:prstDash val="solid"/>
           </a:ln>
         </p:spPr>
+        <p:txBody>
+          <a:bodyPr/>
+          <a:lstStyle/>
+          <a:p>
+            <a:endParaRPr lang="zh-TW" altLang="en-US"/>
+          </a:p>
+        </p:txBody>
       </p:sp>
       <p:sp>
         <p:nvSpPr>
@@ -9673,6 +10951,13 @@
             <a:prstDash val="solid"/>
           </a:ln>
         </p:spPr>
+        <p:txBody>
+          <a:bodyPr/>
+          <a:lstStyle/>
+          <a:p>
+            <a:endParaRPr lang="zh-TW" altLang="en-US"/>
+          </a:p>
+        </p:txBody>
       </p:sp>
       <p:sp>
         <p:nvSpPr>
@@ -9698,6 +10983,13 @@
             <a:prstDash val="solid"/>
           </a:ln>
         </p:spPr>
+        <p:txBody>
+          <a:bodyPr/>
+          <a:lstStyle/>
+          <a:p>
+            <a:endParaRPr lang="zh-TW" altLang="en-US"/>
+          </a:p>
+        </p:txBody>
       </p:sp>
       <p:sp>
         <p:nvSpPr>
@@ -9721,6 +11013,13 @@
             <a:prstDash val="solid"/>
           </a:ln>
         </p:spPr>
+        <p:txBody>
+          <a:bodyPr/>
+          <a:lstStyle/>
+          <a:p>
+            <a:endParaRPr lang="zh-TW" altLang="en-US"/>
+          </a:p>
+        </p:txBody>
       </p:sp>
       <p:sp>
         <p:nvSpPr>
@@ -9903,6 +11202,13 @@
             <a:prstDash val="solid"/>
           </a:ln>
         </p:spPr>
+        <p:txBody>
+          <a:bodyPr/>
+          <a:lstStyle/>
+          <a:p>
+            <a:endParaRPr lang="zh-TW" altLang="en-US"/>
+          </a:p>
+        </p:txBody>
       </p:sp>
       <p:sp>
         <p:nvSpPr>
@@ -9928,6 +11234,13 @@
             <a:prstDash val="solid"/>
           </a:ln>
         </p:spPr>
+        <p:txBody>
+          <a:bodyPr/>
+          <a:lstStyle/>
+          <a:p>
+            <a:endParaRPr lang="zh-TW" altLang="en-US"/>
+          </a:p>
+        </p:txBody>
       </p:sp>
       <p:sp>
         <p:nvSpPr>
@@ -9992,6 +11305,13 @@
             <a:prstDash val="solid"/>
           </a:ln>
         </p:spPr>
+        <p:txBody>
+          <a:bodyPr/>
+          <a:lstStyle/>
+          <a:p>
+            <a:endParaRPr lang="zh-TW" altLang="en-US"/>
+          </a:p>
+        </p:txBody>
       </p:sp>
       <p:sp>
         <p:nvSpPr>
@@ -10099,6 +11419,13 @@
             <a:prstDash val="solid"/>
           </a:ln>
         </p:spPr>
+        <p:txBody>
+          <a:bodyPr/>
+          <a:lstStyle/>
+          <a:p>
+            <a:endParaRPr lang="zh-TW" altLang="en-US"/>
+          </a:p>
+        </p:txBody>
       </p:sp>
       <p:sp>
         <p:nvSpPr>
@@ -10206,6 +11533,13 @@
             <a:prstDash val="solid"/>
           </a:ln>
         </p:spPr>
+        <p:txBody>
+          <a:bodyPr/>
+          <a:lstStyle/>
+          <a:p>
+            <a:endParaRPr lang="zh-TW" altLang="en-US"/>
+          </a:p>
+        </p:txBody>
       </p:sp>
       <p:sp>
         <p:nvSpPr>
@@ -10313,6 +11647,13 @@
             <a:prstDash val="solid"/>
           </a:ln>
         </p:spPr>
+        <p:txBody>
+          <a:bodyPr/>
+          <a:lstStyle/>
+          <a:p>
+            <a:endParaRPr lang="zh-TW" altLang="en-US"/>
+          </a:p>
+        </p:txBody>
       </p:sp>
       <p:sp>
         <p:nvSpPr>
@@ -10422,6 +11763,13 @@
             <a:prstDash val="solid"/>
           </a:ln>
         </p:spPr>
+        <p:txBody>
+          <a:bodyPr/>
+          <a:lstStyle/>
+          <a:p>
+            <a:endParaRPr lang="zh-TW" altLang="en-US"/>
+          </a:p>
+        </p:txBody>
       </p:sp>
       <p:sp>
         <p:nvSpPr>
@@ -10447,6 +11795,13 @@
             <a:prstDash val="solid"/>
           </a:ln>
         </p:spPr>
+        <p:txBody>
+          <a:bodyPr/>
+          <a:lstStyle/>
+          <a:p>
+            <a:endParaRPr lang="zh-TW" altLang="en-US"/>
+          </a:p>
+        </p:txBody>
       </p:sp>
       <p:sp>
         <p:nvSpPr>
@@ -10554,6 +11909,13 @@
             <a:prstDash val="solid"/>
           </a:ln>
         </p:spPr>
+        <p:txBody>
+          <a:bodyPr/>
+          <a:lstStyle/>
+          <a:p>
+            <a:endParaRPr lang="zh-TW" altLang="en-US"/>
+          </a:p>
+        </p:txBody>
       </p:sp>
       <p:sp>
         <p:nvSpPr>
@@ -10624,6 +11986,13 @@
             <a:prstDash val="solid"/>
           </a:ln>
         </p:spPr>
+        <p:txBody>
+          <a:bodyPr/>
+          <a:lstStyle/>
+          <a:p>
+            <a:endParaRPr lang="zh-TW" altLang="en-US"/>
+          </a:p>
+        </p:txBody>
       </p:sp>
       <p:sp>
         <p:nvSpPr>
@@ -10694,6 +12063,13 @@
             <a:prstDash val="solid"/>
           </a:ln>
         </p:spPr>
+        <p:txBody>
+          <a:bodyPr/>
+          <a:lstStyle/>
+          <a:p>
+            <a:endParaRPr lang="zh-TW" altLang="en-US"/>
+          </a:p>
+        </p:txBody>
       </p:sp>
       <p:sp>
         <p:nvSpPr>
@@ -10764,6 +12140,13 @@
             <a:prstDash val="solid"/>
           </a:ln>
         </p:spPr>
+        <p:txBody>
+          <a:bodyPr/>
+          <a:lstStyle/>
+          <a:p>
+            <a:endParaRPr lang="zh-TW" altLang="en-US"/>
+          </a:p>
+        </p:txBody>
       </p:sp>
       <p:sp>
         <p:nvSpPr>
@@ -10834,6 +12217,13 @@
             <a:prstDash val="solid"/>
           </a:ln>
         </p:spPr>
+        <p:txBody>
+          <a:bodyPr/>
+          <a:lstStyle/>
+          <a:p>
+            <a:endParaRPr lang="zh-TW" altLang="en-US"/>
+          </a:p>
+        </p:txBody>
       </p:sp>
       <p:sp>
         <p:nvSpPr>
@@ -10943,6 +12333,13 @@
             <a:prstDash val="solid"/>
           </a:ln>
         </p:spPr>
+        <p:txBody>
+          <a:bodyPr/>
+          <a:lstStyle/>
+          <a:p>
+            <a:endParaRPr lang="zh-TW" altLang="en-US"/>
+          </a:p>
+        </p:txBody>
       </p:sp>
       <p:sp>
         <p:nvSpPr>
@@ -11013,6 +12410,13 @@
             <a:prstDash val="solid"/>
           </a:ln>
         </p:spPr>
+        <p:txBody>
+          <a:bodyPr/>
+          <a:lstStyle/>
+          <a:p>
+            <a:endParaRPr lang="zh-TW" altLang="en-US"/>
+          </a:p>
+        </p:txBody>
       </p:sp>
       <p:sp>
         <p:nvSpPr>
@@ -11083,6 +12487,13 @@
             <a:prstDash val="solid"/>
           </a:ln>
         </p:spPr>
+        <p:txBody>
+          <a:bodyPr/>
+          <a:lstStyle/>
+          <a:p>
+            <a:endParaRPr lang="zh-TW" altLang="en-US"/>
+          </a:p>
+        </p:txBody>
       </p:sp>
       <p:sp>
         <p:nvSpPr>
@@ -11153,6 +12564,13 @@
             <a:prstDash val="solid"/>
           </a:ln>
         </p:spPr>
+        <p:txBody>
+          <a:bodyPr/>
+          <a:lstStyle/>
+          <a:p>
+            <a:endParaRPr lang="zh-TW" altLang="en-US"/>
+          </a:p>
+        </p:txBody>
       </p:sp>
       <p:sp>
         <p:nvSpPr>
@@ -11262,6 +12680,13 @@
             <a:prstDash val="solid"/>
           </a:ln>
         </p:spPr>
+        <p:txBody>
+          <a:bodyPr/>
+          <a:lstStyle/>
+          <a:p>
+            <a:endParaRPr lang="zh-TW" altLang="en-US"/>
+          </a:p>
+        </p:txBody>
       </p:sp>
       <p:sp>
         <p:nvSpPr>

--- a/KANBAN_Lite_Slides.pptx
+++ b/KANBAN_Lite_Slides.pptx
@@ -4778,14 +4778,14 @@
       </p:sp>
       <p:sp>
         <p:nvSpPr>
-          <p:cNvPr id="11" name="Text 9"/>
-          <p:cNvSpPr/>
-          <p:nvPr/>
-        </p:nvSpPr>
-        <p:spPr>
-          <a:xfrm>
-            <a:off x="777240" y="1115568"/>
-            <a:ext cx="10698480" cy="548640"/>
+          <p:cNvPr id="12" name="Text 10"/>
+          <p:cNvSpPr/>
+          <p:nvPr/>
+        </p:nvSpPr>
+        <p:spPr>
+          <a:xfrm>
+            <a:off x="777240" y="1540477"/>
+            <a:ext cx="10698480" cy="507779"/>
           </a:xfrm>
           <a:prstGeom prst="rect">
             <a:avLst/>
@@ -4803,48 +4803,7 @@
               <a:buNone/>
             </a:pPr>
             <a:r>
-              <a:rPr lang="en-US" sz="1500" dirty="0">
-                <a:solidFill>
-                  <a:srgbClr val="A7B0C0"/>
-                </a:solidFill>
-                <a:latin typeface="Microsoft JhengHei" pitchFamily="34" charset="0"/>
-                <a:ea typeface="Microsoft JhengHei" pitchFamily="34" charset="-122"/>
-                <a:cs typeface="Microsoft JhengHei" pitchFamily="34" charset="-120"/>
-              </a:rPr>
-              <a:t>我選擇 Kanban，不只是因為它適合做任務管理工具，而是因為它本身就是一種項目管理方法，可以對應到 SDLC 中的規劃、實作、測試與修正。</a:t>
-            </a:r>
-            <a:endParaRPr lang="en-US" sz="1500" dirty="0"/>
-          </a:p>
-        </p:txBody>
-      </p:sp>
-      <p:sp>
-        <p:nvSpPr>
-          <p:cNvPr id="12" name="Text 10"/>
-          <p:cNvSpPr/>
-          <p:nvPr/>
-        </p:nvSpPr>
-        <p:spPr>
-          <a:xfrm>
-            <a:off x="777240" y="1737360"/>
-            <a:ext cx="10698480" cy="310896"/>
-          </a:xfrm>
-          <a:prstGeom prst="rect">
-            <a:avLst/>
-          </a:prstGeom>
-          <a:noFill/>
-          <a:ln/>
-        </p:spPr>
-        <p:txBody>
-          <a:bodyPr wrap="square" lIns="0" tIns="0" rIns="0" bIns="0" rtlCol="0" anchor="ctr">
-            <a:normAutofit/>
-          </a:bodyPr>
-          <a:lstStyle/>
-          <a:p>
-            <a:pPr marL="0" indent="0">
-              <a:buNone/>
-            </a:pPr>
-            <a:r>
-              <a:rPr lang="en-US" sz="1500" b="1" dirty="0">
+              <a:rPr lang="en-US" sz="1600" b="1" dirty="0">
                 <a:solidFill>
                   <a:srgbClr val="F3F4F6"/>
                 </a:solidFill>
@@ -4854,7 +4813,7 @@
               </a:rPr>
               <a:t>透過實作一個小型 Kanban 系統，我希望一邊完成作品，一邊更具體理解軟體開發生命週期。</a:t>
             </a:r>
-            <a:endParaRPr lang="en-US" sz="1500" dirty="0"/>
+            <a:endParaRPr lang="en-US" sz="1600" dirty="0"/>
           </a:p>
         </p:txBody>
       </p:sp>
@@ -8786,45 +8745,6 @@
       </p:sp>
       <p:sp>
         <p:nvSpPr>
-          <p:cNvPr id="6" name="Text 4"/>
-          <p:cNvSpPr/>
-          <p:nvPr/>
-        </p:nvSpPr>
-        <p:spPr>
-          <a:xfrm>
-            <a:off x="594360" y="822960"/>
-            <a:ext cx="7772400" cy="274320"/>
-          </a:xfrm>
-          <a:prstGeom prst="rect">
-            <a:avLst/>
-          </a:prstGeom>
-          <a:noFill/>
-          <a:ln/>
-        </p:spPr>
-        <p:txBody>
-          <a:bodyPr wrap="square" lIns="0" tIns="0" rIns="0" bIns="0" rtlCol="0" anchor="ctr"/>
-          <a:lstStyle/>
-          <a:p>
-            <a:pPr marL="0" indent="0">
-              <a:buNone/>
-            </a:pPr>
-            <a:r>
-              <a:rPr lang="en-US" sz="1050" dirty="0">
-                <a:solidFill>
-                  <a:srgbClr val="A7B0C0"/>
-                </a:solidFill>
-                <a:latin typeface="Microsoft JhengHei" pitchFamily="34" charset="0"/>
-                <a:ea typeface="Microsoft JhengHei" pitchFamily="34" charset="-122"/>
-                <a:cs typeface="Microsoft JhengHei" pitchFamily="34" charset="-120"/>
-              </a:rPr>
-              <a:t>以「輔助程度」估算，分為 CSS、JavaScript、HTML</a:t>
-            </a:r>
-            <a:endParaRPr lang="en-US" sz="1050" dirty="0"/>
-          </a:p>
-        </p:txBody>
-      </p:sp>
-      <p:sp>
-        <p:nvSpPr>
           <p:cNvPr id="9" name="Text 7"/>
           <p:cNvSpPr/>
           <p:nvPr/>
@@ -11057,45 +10977,6 @@
               <a:t>資料來源與使用工具</a:t>
             </a:r>
             <a:endParaRPr lang="en-US" sz="2400" dirty="0"/>
-          </a:p>
-        </p:txBody>
-      </p:sp>
-      <p:sp>
-        <p:nvSpPr>
-          <p:cNvPr id="6" name="Text 4"/>
-          <p:cNvSpPr/>
-          <p:nvPr/>
-        </p:nvSpPr>
-        <p:spPr>
-          <a:xfrm>
-            <a:off x="594360" y="822960"/>
-            <a:ext cx="7772400" cy="274320"/>
-          </a:xfrm>
-          <a:prstGeom prst="rect">
-            <a:avLst/>
-          </a:prstGeom>
-          <a:noFill/>
-          <a:ln/>
-        </p:spPr>
-        <p:txBody>
-          <a:bodyPr wrap="square" lIns="0" tIns="0" rIns="0" bIns="0" rtlCol="0" anchor="ctr"/>
-          <a:lstStyle/>
-          <a:p>
-            <a:pPr marL="0" indent="0">
-              <a:buNone/>
-            </a:pPr>
-            <a:r>
-              <a:rPr lang="en-US" sz="1050" dirty="0" err="1">
-                <a:solidFill>
-                  <a:srgbClr val="A7B0C0"/>
-                </a:solidFill>
-                <a:latin typeface="Microsoft JhengHei" pitchFamily="34" charset="0"/>
-                <a:ea typeface="Microsoft JhengHei" pitchFamily="34" charset="-122"/>
-                <a:cs typeface="Microsoft JhengHei" pitchFamily="34" charset="-120"/>
-              </a:rPr>
-              <a:t>報告引用來源與開發過程中使用的工具整理</a:t>
-            </a:r>
-            <a:endParaRPr lang="en-US" sz="1050" dirty="0"/>
           </a:p>
         </p:txBody>
       </p:sp>
